--- a/curriculum/M01/W02/L02/slides-2.pptx
+++ b/curriculum/M01/W02/L02/slides-2.pptx
@@ -15628,7 +15628,7 @@
                 <a:ea typeface="Malgun Gothic"/>
                 <a:cs typeface="Malgun Gothic"/>
               </a:rPr>
-              <a:t>M01-W01-L01 순환계 요약 — RAAS, aldosterone, 혈압 조절</a:t>
+              <a:t>M01-W01-L01 순환계 요약: 심장·혈관·혈류와 항상성 — RAAS, aldosterone, 혈압 조절</a:t>
             </a:r>
           </a:p>
           <a:p>
@@ -15657,7 +15657,7 @@
                 <a:ea typeface="Malgun Gothic"/>
                 <a:cs typeface="Malgun Gothic"/>
               </a:rPr>
-              <a:t>M01-W02-L01 신장 요약 — aldosterone과 ADH의 작용 지점, vitamin D 활성화, PTH</a:t>
+              <a:t>M01-W02-L01 신장·비뇨계 요약: 배설·체액·전해질 조절 — aldosterone과 ADH의 작용 지점, vitamin D 활성화, PTH</a:t>
             </a:r>
           </a:p>
           <a:p>

--- a/curriculum/M01/W02/L02/slides-2.pptx
+++ b/curriculum/M01/W02/L02/slides-2.pptx
@@ -5542,6 +5542,35 @@
             <a:spAutoFit/>
           </a:bodyPr>
           <a:lstStyle/>
+          <a:p>
+            <a:pPr>
+              <a:spcAft>
+                <a:spcPts val="900"/>
+              </a:spcAft>
+            </a:pPr>
+            <a:r>
+              <a:rPr sz="1400" b="1" i="0">
+                <a:solidFill>
+                  <a:srgbClr val="F2B705"/>
+                </a:solidFill>
+                <a:latin typeface="Malgun Gothic"/>
+                <a:ea typeface="Malgun Gothic"/>
+                <a:cs typeface="Malgun Gothic"/>
+              </a:rPr>
+              <a:t>•  </a:t>
+            </a:r>
+            <a:r>
+              <a:rPr sz="1400" b="0" i="0">
+                <a:solidFill>
+                  <a:srgbClr val="11202B"/>
+                </a:solidFill>
+                <a:latin typeface="Malgun Gothic"/>
+                <a:ea typeface="Malgun Gothic"/>
+                <a:cs typeface="Malgun Gothic"/>
+              </a:rPr>
+              <a:t>앞 절의 상호작용이 실제로 어떻게 작동하는지를 가장 잘 보여 주는 예가 칼슘 조절이다. 세 호르몬이 세 기관에 동시에 작용하며, 그 가운데 하나라도 어긋나면 신경과 근육의 흥분성이 곧바로 바뀐다. 다른 어떤 전해질보다 좁은 범위로 지켜지는 이유가 거기에 있다.</a:t>
+            </a:r>
+          </a:p>
           <a:p>
             <a:pPr>
               <a:spcAft>
@@ -7772,6 +7801,57 @@
                 <a:ea typeface="Malgun Gothic"/>
                 <a:cs typeface="Malgun Gothic"/>
               </a:rPr>
+              <a:t>지금까지의 조절은 모두 </a:t>
+            </a:r>
+            <a:r>
+              <a:rPr sz="2000" b="1" i="0">
+                <a:solidFill>
+                  <a:srgbClr val="11202B"/>
+                </a:solidFill>
+                <a:latin typeface="Malgun Gothic"/>
+                <a:ea typeface="Malgun Gothic"/>
+                <a:cs typeface="Malgun Gothic"/>
+              </a:rPr>
+              <a:t>지금 이 순간의 상태</a:t>
+            </a:r>
+            <a:r>
+              <a:rPr sz="2000" b="0" i="0">
+                <a:solidFill>
+                  <a:srgbClr val="11202B"/>
+                </a:solidFill>
+                <a:latin typeface="Malgun Gothic"/>
+                <a:ea typeface="Malgun Gothic"/>
+                <a:cs typeface="Malgun Gothic"/>
+              </a:rPr>
+              <a:t>를 일정하게 유지하는 일이었다. 그런데 내분비계는 수십 년에 걸친 변화도 이끈다. 성장이 그 예이며, 한 호르몬이 혼자 하는 것이 아니라 시기마다 주역이 바뀐다는 점이 이 조절의 성격을 보여 준다.</a:t>
+            </a:r>
+          </a:p>
+          <a:p>
+            <a:pPr>
+              <a:spcAft>
+                <a:spcPts val="900"/>
+              </a:spcAft>
+            </a:pPr>
+            <a:r>
+              <a:rPr sz="2000" b="1" i="0">
+                <a:solidFill>
+                  <a:srgbClr val="F2B705"/>
+                </a:solidFill>
+                <a:latin typeface="Malgun Gothic"/>
+                <a:ea typeface="Malgun Gothic"/>
+                <a:cs typeface="Malgun Gothic"/>
+              </a:rPr>
+              <a:t>•  </a:t>
+            </a:r>
+            <a:r>
+              <a:rPr sz="2000" b="0" i="0">
+                <a:solidFill>
+                  <a:srgbClr val="11202B"/>
+                </a:solidFill>
+                <a:latin typeface="Malgun Gothic"/>
+                <a:ea typeface="Malgun Gothic"/>
+                <a:cs typeface="Malgun Gothic"/>
+              </a:rPr>
               <a:t>성장은 한 호르몬이 아니라 시기마다 다른 주역이 이끈다. 이 사실 자체가 내분비 조절의 성격을 보여 준다.</a:t>
             </a:r>
           </a:p>
@@ -9611,6 +9691,57 @@
                 <a:ea typeface="Malgun Gothic"/>
                 <a:cs typeface="Malgun Gothic"/>
               </a:rPr>
+              <a:t>여기까지가 정상 생리였다. 임상으로 넘어가기 전에 한 가지를 먼저 정리해야 한다. 내분비 질환은 대개 </a:t>
+            </a:r>
+            <a:r>
+              <a:rPr sz="1400" b="1" i="0">
+                <a:solidFill>
+                  <a:srgbClr val="11202B"/>
+                </a:solidFill>
+                <a:latin typeface="Malgun Gothic"/>
+                <a:ea typeface="Malgun Gothic"/>
+                <a:cs typeface="Malgun Gothic"/>
+              </a:rPr>
+              <a:t>호르몬 수치를 재서</a:t>
+            </a:r>
+            <a:r>
+              <a:rPr sz="1400" b="0" i="0">
+                <a:solidFill>
+                  <a:srgbClr val="11202B"/>
+                </a:solidFill>
+                <a:latin typeface="Malgun Gothic"/>
+                <a:ea typeface="Malgun Gothic"/>
+                <a:cs typeface="Malgun Gothic"/>
+              </a:rPr>
+              <a:t> 진단하는데, 그 수치를 어떻게 읽어야 하는지가 간단하지 않다. 같은 값이 상황에 따라 정상이기도 하고 병적이기도 하기 때문이다.</a:t>
+            </a:r>
+          </a:p>
+          <a:p>
+            <a:pPr>
+              <a:spcAft>
+                <a:spcPts val="900"/>
+              </a:spcAft>
+            </a:pPr>
+            <a:r>
+              <a:rPr sz="1400" b="1" i="0">
+                <a:solidFill>
+                  <a:srgbClr val="F2B705"/>
+                </a:solidFill>
+                <a:latin typeface="Malgun Gothic"/>
+                <a:ea typeface="Malgun Gothic"/>
+                <a:cs typeface="Malgun Gothic"/>
+              </a:rPr>
+              <a:t>•  </a:t>
+            </a:r>
+            <a:r>
+              <a:rPr sz="1400" b="0" i="0">
+                <a:solidFill>
+                  <a:srgbClr val="11202B"/>
+                </a:solidFill>
+                <a:latin typeface="Malgun Gothic"/>
+                <a:ea typeface="Malgun Gothic"/>
+                <a:cs typeface="Malgun Gothic"/>
+              </a:rPr>
               <a:t>내분비 질환의 진단은 "호르몬 수치를 재면 된다"로 끝나지 않는다. 수치를 해석하려면 네 가지를 함께 따져야 한다.</a:t>
             </a:r>
           </a:p>
@@ -11409,7 +11540,7 @@
               </a:spcAft>
             </a:pPr>
             <a:r>
-              <a:rPr sz="2000" b="1" i="0">
+              <a:rPr sz="1800" b="1" i="0">
                 <a:solidFill>
                   <a:srgbClr val="F2B705"/>
                 </a:solidFill>
@@ -11420,59 +11551,15 @@
               <a:t>•  </a:t>
             </a:r>
             <a:r>
-              <a:rPr sz="2000" b="0" i="0">
-                <a:solidFill>
-                  <a:srgbClr val="11202B"/>
-                </a:solidFill>
-                <a:latin typeface="Malgun Gothic"/>
-                <a:ea typeface="Malgun Gothic"/>
-                <a:cs typeface="Malgun Gothic"/>
-              </a:rPr>
-              <a:t>내분비 질환은 두 축으로 분류하면 체계가 잡힌다. </a:t>
-            </a:r>
-            <a:r>
-              <a:rPr sz="2000" b="1" i="0">
-                <a:solidFill>
-                  <a:srgbClr val="11202B"/>
-                </a:solidFill>
-                <a:latin typeface="Malgun Gothic"/>
-                <a:ea typeface="Malgun Gothic"/>
-                <a:cs typeface="Malgun Gothic"/>
-              </a:rPr>
-              <a:t>과다인가 부족인가</a:t>
-            </a:r>
-            <a:r>
-              <a:rPr sz="2000" b="0" i="0">
-                <a:solidFill>
-                  <a:srgbClr val="11202B"/>
-                </a:solidFill>
-                <a:latin typeface="Malgun Gothic"/>
-                <a:ea typeface="Malgun Gothic"/>
-                <a:cs typeface="Malgun Gothic"/>
-              </a:rPr>
-              <a:t>, 그리고 </a:t>
-            </a:r>
-            <a:r>
-              <a:rPr sz="2000" b="1" i="0">
-                <a:solidFill>
-                  <a:srgbClr val="11202B"/>
-                </a:solidFill>
-                <a:latin typeface="Malgun Gothic"/>
-                <a:ea typeface="Malgun Gothic"/>
-                <a:cs typeface="Malgun Gothic"/>
-              </a:rPr>
-              <a:t>축의 어느 단계에 문제가 있는가</a:t>
-            </a:r>
-            <a:r>
-              <a:rPr sz="2000" b="0" i="0">
-                <a:solidFill>
-                  <a:srgbClr val="11202B"/>
-                </a:solidFill>
-                <a:latin typeface="Malgun Gothic"/>
-                <a:ea typeface="Malgun Gothic"/>
-                <a:cs typeface="Malgun Gothic"/>
-              </a:rPr>
-              <a:t>다.</a:t>
+              <a:rPr sz="1800" b="0" i="0">
+                <a:solidFill>
+                  <a:srgbClr val="11202B"/>
+                </a:solidFill>
+                <a:latin typeface="Malgun Gothic"/>
+                <a:ea typeface="Malgun Gothic"/>
+                <a:cs typeface="Malgun Gothic"/>
+              </a:rPr>
+              <a:t>앞 절에서 수치를 읽는 법을 세웠다. 이제 질환 자체를 분류할 차례다. 내분비 질환은 수가 많지만 두 가지 축으로 놓으면 거의 모두 자리를 찾는다. 그 축은 4절에서 세운 되먹임 구조에서 그대로 나온다.</a:t>
             </a:r>
           </a:p>
           <a:p>
@@ -11482,7 +11569,7 @@
               </a:spcAft>
             </a:pPr>
             <a:r>
-              <a:rPr sz="2000" b="1" i="0">
+              <a:rPr sz="1800" b="1" i="0">
                 <a:solidFill>
                   <a:srgbClr val="F2B705"/>
                 </a:solidFill>
@@ -11493,7 +11580,80 @@
               <a:t>•  </a:t>
             </a:r>
             <a:r>
-              <a:rPr sz="2000" b="1" i="0">
+              <a:rPr sz="1800" b="0" i="0">
+                <a:solidFill>
+                  <a:srgbClr val="11202B"/>
+                </a:solidFill>
+                <a:latin typeface="Malgun Gothic"/>
+                <a:ea typeface="Malgun Gothic"/>
+                <a:cs typeface="Malgun Gothic"/>
+              </a:rPr>
+              <a:t>내분비 질환은 두 축으로 분류하면 체계가 잡힌다. </a:t>
+            </a:r>
+            <a:r>
+              <a:rPr sz="1800" b="1" i="0">
+                <a:solidFill>
+                  <a:srgbClr val="11202B"/>
+                </a:solidFill>
+                <a:latin typeface="Malgun Gothic"/>
+                <a:ea typeface="Malgun Gothic"/>
+                <a:cs typeface="Malgun Gothic"/>
+              </a:rPr>
+              <a:t>과다인가 부족인가</a:t>
+            </a:r>
+            <a:r>
+              <a:rPr sz="1800" b="0" i="0">
+                <a:solidFill>
+                  <a:srgbClr val="11202B"/>
+                </a:solidFill>
+                <a:latin typeface="Malgun Gothic"/>
+                <a:ea typeface="Malgun Gothic"/>
+                <a:cs typeface="Malgun Gothic"/>
+              </a:rPr>
+              <a:t>, 그리고 </a:t>
+            </a:r>
+            <a:r>
+              <a:rPr sz="1800" b="1" i="0">
+                <a:solidFill>
+                  <a:srgbClr val="11202B"/>
+                </a:solidFill>
+                <a:latin typeface="Malgun Gothic"/>
+                <a:ea typeface="Malgun Gothic"/>
+                <a:cs typeface="Malgun Gothic"/>
+              </a:rPr>
+              <a:t>축의 어느 단계에 문제가 있는가</a:t>
+            </a:r>
+            <a:r>
+              <a:rPr sz="1800" b="0" i="0">
+                <a:solidFill>
+                  <a:srgbClr val="11202B"/>
+                </a:solidFill>
+                <a:latin typeface="Malgun Gothic"/>
+                <a:ea typeface="Malgun Gothic"/>
+                <a:cs typeface="Malgun Gothic"/>
+              </a:rPr>
+              <a:t>다.</a:t>
+            </a:r>
+          </a:p>
+          <a:p>
+            <a:pPr>
+              <a:spcAft>
+                <a:spcPts val="900"/>
+              </a:spcAft>
+            </a:pPr>
+            <a:r>
+              <a:rPr sz="1800" b="1" i="0">
+                <a:solidFill>
+                  <a:srgbClr val="F2B705"/>
+                </a:solidFill>
+                <a:latin typeface="Malgun Gothic"/>
+                <a:ea typeface="Malgun Gothic"/>
+                <a:cs typeface="Malgun Gothic"/>
+              </a:rPr>
+              <a:t>•  </a:t>
+            </a:r>
+            <a:r>
+              <a:rPr sz="1800" b="1" i="0">
                 <a:solidFill>
                   <a:srgbClr val="11202B"/>
                 </a:solidFill>
@@ -11504,7 +11664,7 @@
               <a:t>원발성(primary)과 이차성(secondary)의 구분</a:t>
             </a:r>
             <a:r>
-              <a:rPr sz="2000" b="0" i="0">
+              <a:rPr sz="1800" b="0" i="0">
                 <a:solidFill>
                   <a:srgbClr val="11202B"/>
                 </a:solidFill>
@@ -20344,6 +20504,57 @@
                 <a:ea typeface="Malgun Gothic"/>
                 <a:cs typeface="Malgun Gothic"/>
               </a:rPr>
+              <a:t>앞의 축들은 모두 시상하부와 뇌하수체를 거치는 긴 경로였다. 그런데 모든 내분비 조절이 그렇지는 않다. 혈당 조절은 뇌를 거치지 않고 </a:t>
+            </a:r>
+            <a:r>
+              <a:rPr sz="1400" b="1" i="0">
+                <a:solidFill>
+                  <a:srgbClr val="11202B"/>
+                </a:solidFill>
+                <a:latin typeface="Malgun Gothic"/>
+                <a:ea typeface="Malgun Gothic"/>
+                <a:cs typeface="Malgun Gothic"/>
+              </a:rPr>
+              <a:t>췌장이 직접 혈당을 감지해 반응한다.</a:t>
+            </a:r>
+            <a:r>
+              <a:rPr sz="1400" b="0" i="0">
+                <a:solidFill>
+                  <a:srgbClr val="11202B"/>
+                </a:solidFill>
+                <a:latin typeface="Malgun Gothic"/>
+                <a:ea typeface="Malgun Gothic"/>
+                <a:cs typeface="Malgun Gothic"/>
+              </a:rPr>
+              <a:t> 더 짧고 빠른 이 구조가 왜 혈당에서만 쓰이는지를 생각하며 읽으면 좋다.</a:t>
+            </a:r>
+          </a:p>
+          <a:p>
+            <a:pPr>
+              <a:spcAft>
+                <a:spcPts val="900"/>
+              </a:spcAft>
+            </a:pPr>
+            <a:r>
+              <a:rPr sz="1400" b="1" i="0">
+                <a:solidFill>
+                  <a:srgbClr val="F2B705"/>
+                </a:solidFill>
+                <a:latin typeface="Malgun Gothic"/>
+                <a:ea typeface="Malgun Gothic"/>
+                <a:cs typeface="Malgun Gothic"/>
+              </a:rPr>
+              <a:t>•  </a:t>
+            </a:r>
+            <a:r>
+              <a:rPr sz="1400" b="0" i="0">
+                <a:solidFill>
+                  <a:srgbClr val="11202B"/>
+                </a:solidFill>
+                <a:latin typeface="Malgun Gothic"/>
+                <a:ea typeface="Malgun Gothic"/>
+                <a:cs typeface="Malgun Gothic"/>
+              </a:rPr>
               <a:t>혈당 조절은 내분비 조절의 원리를 가장 선명하게 보여 주는 예다. 두 호르몬이 반대 방향으로 작용하며, 둘 다 췌장의 </a:t>
             </a:r>
             <a:r>
@@ -21815,6 +22026,35 @@
             <a:spAutoFit/>
           </a:bodyPr>
           <a:lstStyle/>
+          <a:p>
+            <a:pPr>
+              <a:spcAft>
+                <a:spcPts val="900"/>
+              </a:spcAft>
+            </a:pPr>
+            <a:r>
+              <a:rPr sz="1400" b="1" i="0">
+                <a:solidFill>
+                  <a:srgbClr val="F2B705"/>
+                </a:solidFill>
+                <a:latin typeface="Malgun Gothic"/>
+                <a:ea typeface="Malgun Gothic"/>
+                <a:cs typeface="Malgun Gothic"/>
+              </a:rPr>
+              <a:t>•  </a:t>
+            </a:r>
+            <a:r>
+              <a:rPr sz="1400" b="0" i="0">
+                <a:solidFill>
+                  <a:srgbClr val="11202B"/>
+                </a:solidFill>
+                <a:latin typeface="Malgun Gothic"/>
+                <a:ea typeface="Malgun Gothic"/>
+                <a:cs typeface="Malgun Gothic"/>
+              </a:rPr>
+              <a:t>여기까지 호르몬을 하나씩, 축을 하나씩 보았다. 그런데 실제 몸에서는 여러 호르몬이 같은 표적에 동시에 작용한다. 그래서 한 호르몬의 효과를 안다고 해서 결과를 예측할 수 있는 것은 아니다. 이 절은 그 합쳐지는 방식을 세 가지로 정리한다.</a:t>
+            </a:r>
+          </a:p>
           <a:p>
             <a:pPr>
               <a:spcAft>
